--- a/poster.pptx
+++ b/poster.pptx
@@ -4086,7 +4086,7 @@
                 <a:latin typeface="Calibri" panose="020F0502020204030204" pitchFamily="34" charset="0"/>
                 <a:ea typeface="SimSun" panose="02010600030101010101" pitchFamily="2" charset="-122"/>
               </a:rPr>
-              <a:t>Supervisor: Tianxing Cui</a:t>
+              <a:t>Supervisor: Tianxiang Cui</a:t>
             </a:r>
           </a:p>
         </p:txBody>
